--- a/ws02/class/ws02_slide_class3.pptx
+++ b/ws02/class/ws02_slide_class3.pptx
@@ -264,7 +264,7 @@
 </file>
 
 <file path=ppt/notesSlides/notesSlide1.xml><?xml version="1.0" encoding="utf-8"?>
-<p:notes xmlns:a="http://schemas.openxmlformats.org/drawingml/2006/main" xmlns:r="http://schemas.openxmlformats.org/officeDocument/2006/relationships" xmlns:p="http://schemas.openxmlformats.org/presentationml/2006/main" showMasterSp="0" showMasterPhAnim="0">
+<p:notes xmlns:a="http://schemas.openxmlformats.org/drawingml/2006/main" xmlns:p="http://schemas.openxmlformats.org/presentationml/2006/main" showMasterSp="0" showMasterPhAnim="0">
   <p:cSld>
     <p:spTree>
       <p:nvGrpSpPr>
@@ -360,32 +360,7 @@
           </a:bodyPr>
           <a:lstStyle/>
           <a:p>
-            <a:pPr marL="0" marR="0" lvl="0" indent="0" algn="l" rtl="0">
-              <a:lnSpc>
-                <a:spcPct val="100000"/>
-              </a:lnSpc>
-              <a:spcBef>
-                <a:spcPts val="0"/>
-              </a:spcBef>
-              <a:spcAft>
-                <a:spcPts val="0"/>
-              </a:spcAft>
-              <a:buClr>
-                <a:schemeClr val="dk1"/>
-              </a:buClr>
-              <a:buSzPts val="1100"/>
-              <a:buFont typeface="Malgun Gothic"/>
-              <a:buNone/>
-            </a:pPr>
-            <a:endParaRPr sz="1200" b="0" i="0" u="none" strike="noStrike" cap="none">
-              <a:solidFill>
-                <a:schemeClr val="dk1"/>
-              </a:solidFill>
-              <a:latin typeface="Malgun Gothic"/>
-              <a:ea typeface="Malgun Gothic"/>
-              <a:cs typeface="Malgun Gothic"/>
-              <a:sym typeface="Malgun Gothic"/>
-            </a:endParaRPr>
+            <a:endParaRPr dirty="0"/>
           </a:p>
         </p:txBody>
       </p:sp>
@@ -398,7 +373,7 @@
 </file>
 
 <file path=ppt/notesSlides/notesSlide10.xml><?xml version="1.0" encoding="utf-8"?>
-<p:notes xmlns:a="http://schemas.openxmlformats.org/drawingml/2006/main" xmlns:r="http://schemas.openxmlformats.org/officeDocument/2006/relationships" xmlns:p="http://schemas.openxmlformats.org/presentationml/2006/main">
+<p:notes xmlns:a="http://schemas.openxmlformats.org/drawingml/2006/main" xmlns:ns2="http://schemas.microsoft.com/office/powerpoint/2010/main" xmlns:p="http://schemas.openxmlformats.org/presentationml/2006/main">
   <p:cSld>
     <p:spTree>
       <p:nvGrpSpPr>
@@ -441,7 +416,7 @@
           <a:bodyPr/>
           <a:lstStyle/>
           <a:p>
-            <a:endParaRPr lang="en-US" dirty="0"/>
+            <a:endParaRPr dirty="0"/>
           </a:p>
         </p:txBody>
       </p:sp>
@@ -471,7 +446,7 @@
     </p:spTree>
     <p:extLst>
       <p:ext uri="{BB962C8B-B14F-4D97-AF65-F5344CB8AC3E}">
-        <p14:creationId xmlns:p14="http://schemas.microsoft.com/office/powerpoint/2010/main" val="1024086991"/>
+        <ns2:creationId val="1024086991"/>
       </p:ext>
     </p:extLst>
   </p:cSld>
@@ -482,7 +457,7 @@
 </file>
 
 <file path=ppt/notesSlides/notesSlide11.xml><?xml version="1.0" encoding="utf-8"?>
-<p:notes xmlns:a="http://schemas.openxmlformats.org/drawingml/2006/main" xmlns:r="http://schemas.openxmlformats.org/officeDocument/2006/relationships" xmlns:p="http://schemas.openxmlformats.org/presentationml/2006/main">
+<p:notes xmlns:a="http://schemas.openxmlformats.org/drawingml/2006/main" xmlns:ns2="http://schemas.microsoft.com/office/powerpoint/2010/main" xmlns:p="http://schemas.openxmlformats.org/presentationml/2006/main">
   <p:cSld>
     <p:spTree>
       <p:nvGrpSpPr>
@@ -525,7 +500,7 @@
           <a:bodyPr/>
           <a:lstStyle/>
           <a:p>
-            <a:endParaRPr lang="en-US" dirty="0"/>
+            <a:endParaRPr dirty="0"/>
           </a:p>
         </p:txBody>
       </p:sp>
@@ -555,7 +530,7 @@
     </p:spTree>
     <p:extLst>
       <p:ext uri="{BB962C8B-B14F-4D97-AF65-F5344CB8AC3E}">
-        <p14:creationId xmlns:p14="http://schemas.microsoft.com/office/powerpoint/2010/main" val="1024086991"/>
+        <ns2:creationId val="1024086991"/>
       </p:ext>
     </p:extLst>
   </p:cSld>
@@ -566,7 +541,7 @@
 </file>
 
 <file path=ppt/notesSlides/notesSlide12.xml><?xml version="1.0" encoding="utf-8"?>
-<p:notes xmlns:a="http://schemas.openxmlformats.org/drawingml/2006/main" xmlns:r="http://schemas.openxmlformats.org/officeDocument/2006/relationships" xmlns:p="http://schemas.openxmlformats.org/presentationml/2006/main">
+<p:notes xmlns:a="http://schemas.openxmlformats.org/drawingml/2006/main" xmlns:ns2="http://schemas.microsoft.com/office/powerpoint/2010/main" xmlns:p="http://schemas.openxmlformats.org/presentationml/2006/main">
   <p:cSld>
     <p:spTree>
       <p:nvGrpSpPr>
@@ -609,7 +584,7 @@
           <a:bodyPr/>
           <a:lstStyle/>
           <a:p>
-            <a:endParaRPr lang="en-US" dirty="0"/>
+            <a:endParaRPr dirty="0"/>
           </a:p>
         </p:txBody>
       </p:sp>
@@ -639,7 +614,7 @@
     </p:spTree>
     <p:extLst>
       <p:ext uri="{BB962C8B-B14F-4D97-AF65-F5344CB8AC3E}">
-        <p14:creationId xmlns:p14="http://schemas.microsoft.com/office/powerpoint/2010/main" val="1024086991"/>
+        <ns2:creationId val="1024086991"/>
       </p:ext>
     </p:extLst>
   </p:cSld>
@@ -650,7 +625,7 @@
 </file>
 
 <file path=ppt/notesSlides/notesSlide13.xml><?xml version="1.0" encoding="utf-8"?>
-<p:notes xmlns:a="http://schemas.openxmlformats.org/drawingml/2006/main" xmlns:r="http://schemas.openxmlformats.org/officeDocument/2006/relationships" xmlns:p="http://schemas.openxmlformats.org/presentationml/2006/main">
+<p:notes xmlns:a="http://schemas.openxmlformats.org/drawingml/2006/main" xmlns:ns2="http://schemas.microsoft.com/office/powerpoint/2010/main" xmlns:p="http://schemas.openxmlformats.org/presentationml/2006/main">
   <p:cSld>
     <p:spTree>
       <p:nvGrpSpPr>
@@ -693,7 +668,7 @@
           <a:bodyPr/>
           <a:lstStyle/>
           <a:p>
-            <a:endParaRPr lang="en-US" dirty="0"/>
+            <a:endParaRPr dirty="0"/>
           </a:p>
         </p:txBody>
       </p:sp>
@@ -723,7 +698,7 @@
     </p:spTree>
     <p:extLst>
       <p:ext uri="{BB962C8B-B14F-4D97-AF65-F5344CB8AC3E}">
-        <p14:creationId xmlns:p14="http://schemas.microsoft.com/office/powerpoint/2010/main" val="1024086991"/>
+        <ns2:creationId val="1024086991"/>
       </p:ext>
     </p:extLst>
   </p:cSld>
@@ -734,7 +709,7 @@
 </file>
 
 <file path=ppt/notesSlides/notesSlide14.xml><?xml version="1.0" encoding="utf-8"?>
-<p:notes xmlns:a="http://schemas.openxmlformats.org/drawingml/2006/main" xmlns:r="http://schemas.openxmlformats.org/officeDocument/2006/relationships" xmlns:p="http://schemas.openxmlformats.org/presentationml/2006/main">
+<p:notes xmlns:a="http://schemas.openxmlformats.org/drawingml/2006/main" xmlns:ns2="http://schemas.microsoft.com/office/powerpoint/2010/main" xmlns:p="http://schemas.openxmlformats.org/presentationml/2006/main">
   <p:cSld>
     <p:spTree>
       <p:nvGrpSpPr>
@@ -777,7 +752,7 @@
           <a:bodyPr/>
           <a:lstStyle/>
           <a:p>
-            <a:endParaRPr lang="en-US" dirty="0"/>
+            <a:endParaRPr dirty="0"/>
           </a:p>
         </p:txBody>
       </p:sp>
@@ -807,7 +782,7 @@
     </p:spTree>
     <p:extLst>
       <p:ext uri="{BB962C8B-B14F-4D97-AF65-F5344CB8AC3E}">
-        <p14:creationId xmlns:p14="http://schemas.microsoft.com/office/powerpoint/2010/main" val="1024086991"/>
+        <ns2:creationId val="1024086991"/>
       </p:ext>
     </p:extLst>
   </p:cSld>
@@ -818,7 +793,7 @@
 </file>
 
 <file path=ppt/notesSlides/notesSlide15.xml><?xml version="1.0" encoding="utf-8"?>
-<p:notes xmlns:a="http://schemas.openxmlformats.org/drawingml/2006/main" xmlns:r="http://schemas.openxmlformats.org/officeDocument/2006/relationships" xmlns:p="http://schemas.openxmlformats.org/presentationml/2006/main">
+<p:notes xmlns:a="http://schemas.openxmlformats.org/drawingml/2006/main" xmlns:ns2="http://schemas.microsoft.com/office/powerpoint/2010/main" xmlns:p="http://schemas.openxmlformats.org/presentationml/2006/main">
   <p:cSld>
     <p:spTree>
       <p:nvGrpSpPr>
@@ -861,7 +836,7 @@
           <a:bodyPr/>
           <a:lstStyle/>
           <a:p>
-            <a:endParaRPr lang="en-US" dirty="0"/>
+            <a:endParaRPr dirty="0"/>
           </a:p>
         </p:txBody>
       </p:sp>
@@ -891,7 +866,7 @@
     </p:spTree>
     <p:extLst>
       <p:ext uri="{BB962C8B-B14F-4D97-AF65-F5344CB8AC3E}">
-        <p14:creationId xmlns:p14="http://schemas.microsoft.com/office/powerpoint/2010/main" val="1024086991"/>
+        <ns2:creationId val="1024086991"/>
       </p:ext>
     </p:extLst>
   </p:cSld>
@@ -902,7 +877,7 @@
 </file>
 
 <file path=ppt/notesSlides/notesSlide16.xml><?xml version="1.0" encoding="utf-8"?>
-<p:notes xmlns:a="http://schemas.openxmlformats.org/drawingml/2006/main" xmlns:r="http://schemas.openxmlformats.org/officeDocument/2006/relationships" xmlns:p="http://schemas.openxmlformats.org/presentationml/2006/main">
+<p:notes xmlns:a="http://schemas.openxmlformats.org/drawingml/2006/main" xmlns:ns2="http://schemas.microsoft.com/office/powerpoint/2010/main" xmlns:p="http://schemas.openxmlformats.org/presentationml/2006/main">
   <p:cSld>
     <p:spTree>
       <p:nvGrpSpPr>
@@ -945,7 +920,7 @@
           <a:bodyPr/>
           <a:lstStyle/>
           <a:p>
-            <a:endParaRPr lang="en-US" dirty="0"/>
+            <a:endParaRPr dirty="0"/>
           </a:p>
         </p:txBody>
       </p:sp>
@@ -975,7 +950,7 @@
     </p:spTree>
     <p:extLst>
       <p:ext uri="{BB962C8B-B14F-4D97-AF65-F5344CB8AC3E}">
-        <p14:creationId xmlns:p14="http://schemas.microsoft.com/office/powerpoint/2010/main" val="1024086991"/>
+        <ns2:creationId val="1024086991"/>
       </p:ext>
     </p:extLst>
   </p:cSld>
@@ -986,7 +961,7 @@
 </file>
 
 <file path=ppt/notesSlides/notesSlide17.xml><?xml version="1.0" encoding="utf-8"?>
-<p:notes xmlns:a="http://schemas.openxmlformats.org/drawingml/2006/main" xmlns:r="http://schemas.openxmlformats.org/officeDocument/2006/relationships" xmlns:p="http://schemas.openxmlformats.org/presentationml/2006/main">
+<p:notes xmlns:a="http://schemas.openxmlformats.org/drawingml/2006/main" xmlns:ns2="http://schemas.microsoft.com/office/powerpoint/2010/main" xmlns:p="http://schemas.openxmlformats.org/presentationml/2006/main">
   <p:cSld>
     <p:spTree>
       <p:nvGrpSpPr>
@@ -1029,7 +1004,7 @@
           <a:bodyPr/>
           <a:lstStyle/>
           <a:p>
-            <a:endParaRPr lang="en-US" dirty="0"/>
+            <a:endParaRPr dirty="0"/>
           </a:p>
         </p:txBody>
       </p:sp>
@@ -1059,7 +1034,7 @@
     </p:spTree>
     <p:extLst>
       <p:ext uri="{BB962C8B-B14F-4D97-AF65-F5344CB8AC3E}">
-        <p14:creationId xmlns:p14="http://schemas.microsoft.com/office/powerpoint/2010/main" val="1024086991"/>
+        <ns2:creationId val="1024086991"/>
       </p:ext>
     </p:extLst>
   </p:cSld>
@@ -1070,7 +1045,7 @@
 </file>
 
 <file path=ppt/notesSlides/notesSlide18.xml><?xml version="1.0" encoding="utf-8"?>
-<p:notes xmlns:a="http://schemas.openxmlformats.org/drawingml/2006/main" xmlns:r="http://schemas.openxmlformats.org/officeDocument/2006/relationships" xmlns:p="http://schemas.openxmlformats.org/presentationml/2006/main">
+<p:notes xmlns:a="http://schemas.openxmlformats.org/drawingml/2006/main" xmlns:ns2="http://schemas.microsoft.com/office/powerpoint/2010/main" xmlns:p="http://schemas.openxmlformats.org/presentationml/2006/main">
   <p:cSld>
     <p:spTree>
       <p:nvGrpSpPr>
@@ -1113,7 +1088,7 @@
           <a:bodyPr/>
           <a:lstStyle/>
           <a:p>
-            <a:endParaRPr lang="en-US" dirty="0"/>
+            <a:endParaRPr dirty="0"/>
           </a:p>
         </p:txBody>
       </p:sp>
@@ -1143,7 +1118,7 @@
     </p:spTree>
     <p:extLst>
       <p:ext uri="{BB962C8B-B14F-4D97-AF65-F5344CB8AC3E}">
-        <p14:creationId xmlns:p14="http://schemas.microsoft.com/office/powerpoint/2010/main" val="1024086991"/>
+        <ns2:creationId val="1024086991"/>
       </p:ext>
     </p:extLst>
   </p:cSld>
@@ -1154,7 +1129,7 @@
 </file>
 
 <file path=ppt/notesSlides/notesSlide19.xml><?xml version="1.0" encoding="utf-8"?>
-<p:notes xmlns:a="http://schemas.openxmlformats.org/drawingml/2006/main" xmlns:r="http://schemas.openxmlformats.org/officeDocument/2006/relationships" xmlns:p="http://schemas.openxmlformats.org/presentationml/2006/main">
+<p:notes xmlns:a="http://schemas.openxmlformats.org/drawingml/2006/main" xmlns:ns2="http://schemas.microsoft.com/office/powerpoint/2010/main" xmlns:p="http://schemas.openxmlformats.org/presentationml/2006/main">
   <p:cSld>
     <p:spTree>
       <p:nvGrpSpPr>
@@ -1197,7 +1172,7 @@
           <a:bodyPr/>
           <a:lstStyle/>
           <a:p>
-            <a:endParaRPr lang="en-US" dirty="0"/>
+            <a:endParaRPr dirty="0"/>
           </a:p>
         </p:txBody>
       </p:sp>
@@ -1227,7 +1202,7 @@
     </p:spTree>
     <p:extLst>
       <p:ext uri="{BB962C8B-B14F-4D97-AF65-F5344CB8AC3E}">
-        <p14:creationId xmlns:p14="http://schemas.microsoft.com/office/powerpoint/2010/main" val="1024086991"/>
+        <ns2:creationId val="1024086991"/>
       </p:ext>
     </p:extLst>
   </p:cSld>
@@ -1238,7 +1213,7 @@
 </file>
 
 <file path=ppt/notesSlides/notesSlide2.xml><?xml version="1.0" encoding="utf-8"?>
-<p:notes xmlns:a="http://schemas.openxmlformats.org/drawingml/2006/main" xmlns:r="http://schemas.openxmlformats.org/officeDocument/2006/relationships" xmlns:p="http://schemas.openxmlformats.org/presentationml/2006/main">
+<p:notes xmlns:a="http://schemas.openxmlformats.org/drawingml/2006/main" xmlns:ns2="http://schemas.microsoft.com/office/powerpoint/2010/main" xmlns:p="http://schemas.openxmlformats.org/presentationml/2006/main">
   <p:cSld>
     <p:spTree>
       <p:nvGrpSpPr>
@@ -1281,7 +1256,7 @@
           <a:bodyPr/>
           <a:lstStyle/>
           <a:p>
-            <a:endParaRPr lang="en-US" dirty="0"/>
+            <a:endParaRPr dirty="0"/>
           </a:p>
         </p:txBody>
       </p:sp>
@@ -1311,7 +1286,7 @@
     </p:spTree>
     <p:extLst>
       <p:ext uri="{BB962C8B-B14F-4D97-AF65-F5344CB8AC3E}">
-        <p14:creationId xmlns:p14="http://schemas.microsoft.com/office/powerpoint/2010/main" val="1024086991"/>
+        <ns2:creationId val="1024086991"/>
       </p:ext>
     </p:extLst>
   </p:cSld>
@@ -1322,7 +1297,7 @@
 </file>
 
 <file path=ppt/notesSlides/notesSlide20.xml><?xml version="1.0" encoding="utf-8"?>
-<p:notes xmlns:a="http://schemas.openxmlformats.org/drawingml/2006/main" xmlns:r="http://schemas.openxmlformats.org/officeDocument/2006/relationships" xmlns:p="http://schemas.openxmlformats.org/presentationml/2006/main">
+<p:notes xmlns:a="http://schemas.openxmlformats.org/drawingml/2006/main" xmlns:ns2="http://schemas.microsoft.com/office/powerpoint/2010/main" xmlns:p="http://schemas.openxmlformats.org/presentationml/2006/main">
   <p:cSld>
     <p:spTree>
       <p:nvGrpSpPr>
@@ -1365,7 +1340,7 @@
           <a:bodyPr/>
           <a:lstStyle/>
           <a:p>
-            <a:endParaRPr lang="en-US" dirty="0"/>
+            <a:endParaRPr dirty="0"/>
           </a:p>
         </p:txBody>
       </p:sp>
@@ -1395,7 +1370,7 @@
     </p:spTree>
     <p:extLst>
       <p:ext uri="{BB962C8B-B14F-4D97-AF65-F5344CB8AC3E}">
-        <p14:creationId xmlns:p14="http://schemas.microsoft.com/office/powerpoint/2010/main" val="1024086991"/>
+        <ns2:creationId val="1024086991"/>
       </p:ext>
     </p:extLst>
   </p:cSld>
@@ -1406,7 +1381,7 @@
 </file>
 
 <file path=ppt/notesSlides/notesSlide21.xml><?xml version="1.0" encoding="utf-8"?>
-<p:notes xmlns:a="http://schemas.openxmlformats.org/drawingml/2006/main" xmlns:r="http://schemas.openxmlformats.org/officeDocument/2006/relationships" xmlns:p="http://schemas.openxmlformats.org/presentationml/2006/main">
+<p:notes xmlns:a="http://schemas.openxmlformats.org/drawingml/2006/main" xmlns:ns2="http://schemas.microsoft.com/office/powerpoint/2010/main" xmlns:p="http://schemas.openxmlformats.org/presentationml/2006/main">
   <p:cSld>
     <p:spTree>
       <p:nvGrpSpPr>
@@ -1449,7 +1424,7 @@
           <a:bodyPr/>
           <a:lstStyle/>
           <a:p>
-            <a:endParaRPr lang="en-US" dirty="0"/>
+            <a:endParaRPr dirty="0"/>
           </a:p>
         </p:txBody>
       </p:sp>
@@ -1479,7 +1454,7 @@
     </p:spTree>
     <p:extLst>
       <p:ext uri="{BB962C8B-B14F-4D97-AF65-F5344CB8AC3E}">
-        <p14:creationId xmlns:p14="http://schemas.microsoft.com/office/powerpoint/2010/main" val="1024086991"/>
+        <ns2:creationId val="1024086991"/>
       </p:ext>
     </p:extLst>
   </p:cSld>
@@ -1490,7 +1465,7 @@
 </file>
 
 <file path=ppt/notesSlides/notesSlide22.xml><?xml version="1.0" encoding="utf-8"?>
-<p:notes xmlns:a="http://schemas.openxmlformats.org/drawingml/2006/main" xmlns:r="http://schemas.openxmlformats.org/officeDocument/2006/relationships" xmlns:p="http://schemas.openxmlformats.org/presentationml/2006/main">
+<p:notes xmlns:a="http://schemas.openxmlformats.org/drawingml/2006/main" xmlns:ns2="http://schemas.microsoft.com/office/powerpoint/2010/main" xmlns:p="http://schemas.openxmlformats.org/presentationml/2006/main">
   <p:cSld>
     <p:spTree>
       <p:nvGrpSpPr>
@@ -1533,7 +1508,7 @@
           <a:bodyPr/>
           <a:lstStyle/>
           <a:p>
-            <a:endParaRPr lang="en-US" dirty="0"/>
+            <a:endParaRPr dirty="0"/>
           </a:p>
         </p:txBody>
       </p:sp>
@@ -1563,7 +1538,7 @@
     </p:spTree>
     <p:extLst>
       <p:ext uri="{BB962C8B-B14F-4D97-AF65-F5344CB8AC3E}">
-        <p14:creationId xmlns:p14="http://schemas.microsoft.com/office/powerpoint/2010/main" val="1024086991"/>
+        <ns2:creationId val="1024086991"/>
       </p:ext>
     </p:extLst>
   </p:cSld>
@@ -1574,7 +1549,7 @@
 </file>
 
 <file path=ppt/notesSlides/notesSlide23.xml><?xml version="1.0" encoding="utf-8"?>
-<p:notes xmlns:a="http://schemas.openxmlformats.org/drawingml/2006/main" xmlns:r="http://schemas.openxmlformats.org/officeDocument/2006/relationships" xmlns:p="http://schemas.openxmlformats.org/presentationml/2006/main">
+<p:notes xmlns:a="http://schemas.openxmlformats.org/drawingml/2006/main" xmlns:ns2="http://schemas.microsoft.com/office/powerpoint/2010/main" xmlns:p="http://schemas.openxmlformats.org/presentationml/2006/main">
   <p:cSld>
     <p:spTree>
       <p:nvGrpSpPr>
@@ -1617,7 +1592,7 @@
           <a:bodyPr/>
           <a:lstStyle/>
           <a:p>
-            <a:endParaRPr lang="en-US" dirty="0"/>
+            <a:endParaRPr dirty="0"/>
           </a:p>
         </p:txBody>
       </p:sp>
@@ -1647,7 +1622,7 @@
     </p:spTree>
     <p:extLst>
       <p:ext uri="{BB962C8B-B14F-4D97-AF65-F5344CB8AC3E}">
-        <p14:creationId xmlns:p14="http://schemas.microsoft.com/office/powerpoint/2010/main" val="1024086991"/>
+        <ns2:creationId val="1024086991"/>
       </p:ext>
     </p:extLst>
   </p:cSld>
@@ -1658,7 +1633,7 @@
 </file>
 
 <file path=ppt/notesSlides/notesSlide24.xml><?xml version="1.0" encoding="utf-8"?>
-<p:notes xmlns:a="http://schemas.openxmlformats.org/drawingml/2006/main" xmlns:r="http://schemas.openxmlformats.org/officeDocument/2006/relationships" xmlns:p="http://schemas.openxmlformats.org/presentationml/2006/main">
+<p:notes xmlns:a="http://schemas.openxmlformats.org/drawingml/2006/main" xmlns:ns2="http://schemas.microsoft.com/office/powerpoint/2010/main" xmlns:p="http://schemas.openxmlformats.org/presentationml/2006/main">
   <p:cSld>
     <p:spTree>
       <p:nvGrpSpPr>
@@ -1701,7 +1676,7 @@
           <a:bodyPr/>
           <a:lstStyle/>
           <a:p>
-            <a:endParaRPr lang="en-US" dirty="0"/>
+            <a:endParaRPr dirty="0"/>
           </a:p>
         </p:txBody>
       </p:sp>
@@ -1731,7 +1706,7 @@
     </p:spTree>
     <p:extLst>
       <p:ext uri="{BB962C8B-B14F-4D97-AF65-F5344CB8AC3E}">
-        <p14:creationId xmlns:p14="http://schemas.microsoft.com/office/powerpoint/2010/main" val="1024086991"/>
+        <ns2:creationId val="1024086991"/>
       </p:ext>
     </p:extLst>
   </p:cSld>
@@ -1742,7 +1717,7 @@
 </file>
 
 <file path=ppt/notesSlides/notesSlide25.xml><?xml version="1.0" encoding="utf-8"?>
-<p:notes xmlns:a="http://schemas.openxmlformats.org/drawingml/2006/main" xmlns:r="http://schemas.openxmlformats.org/officeDocument/2006/relationships" xmlns:p="http://schemas.openxmlformats.org/presentationml/2006/main" showMasterSp="0" showMasterPhAnim="0">
+<p:notes xmlns:a="http://schemas.openxmlformats.org/drawingml/2006/main" xmlns:p="http://schemas.openxmlformats.org/presentationml/2006/main" showMasterSp="0" showMasterPhAnim="0">
   <p:cSld>
     <p:spTree>
       <p:nvGrpSpPr>
@@ -1838,20 +1813,7 @@
           </a:bodyPr>
           <a:lstStyle/>
           <a:p>
-            <a:pPr marL="0" lvl="0" indent="0" algn="l" rtl="0">
-              <a:lnSpc>
-                <a:spcPct val="100000"/>
-              </a:lnSpc>
-              <a:spcBef>
-                <a:spcPts val="0"/>
-              </a:spcBef>
-              <a:spcAft>
-                <a:spcPts val="0"/>
-              </a:spcAft>
-              <a:buSzPts val="1100"/>
-              <a:buNone/>
-            </a:pPr>
-            <a:endParaRPr/>
+            <a:endParaRPr dirty="0"/>
           </a:p>
         </p:txBody>
       </p:sp>
@@ -1864,7 +1826,7 @@
 </file>
 
 <file path=ppt/notesSlides/notesSlide3.xml><?xml version="1.0" encoding="utf-8"?>
-<p:notes xmlns:a="http://schemas.openxmlformats.org/drawingml/2006/main" xmlns:r="http://schemas.openxmlformats.org/officeDocument/2006/relationships" xmlns:p="http://schemas.openxmlformats.org/presentationml/2006/main">
+<p:notes xmlns:a="http://schemas.openxmlformats.org/drawingml/2006/main" xmlns:ns2="http://schemas.microsoft.com/office/powerpoint/2010/main" xmlns:p="http://schemas.openxmlformats.org/presentationml/2006/main">
   <p:cSld>
     <p:spTree>
       <p:nvGrpSpPr>
@@ -1907,7 +1869,7 @@
           <a:bodyPr/>
           <a:lstStyle/>
           <a:p>
-            <a:endParaRPr lang="en-US" dirty="0"/>
+            <a:endParaRPr dirty="0"/>
           </a:p>
         </p:txBody>
       </p:sp>
@@ -1937,7 +1899,7 @@
     </p:spTree>
     <p:extLst>
       <p:ext uri="{BB962C8B-B14F-4D97-AF65-F5344CB8AC3E}">
-        <p14:creationId xmlns:p14="http://schemas.microsoft.com/office/powerpoint/2010/main" val="1024086991"/>
+        <ns2:creationId val="1024086991"/>
       </p:ext>
     </p:extLst>
   </p:cSld>
@@ -1948,7 +1910,7 @@
 </file>
 
 <file path=ppt/notesSlides/notesSlide4.xml><?xml version="1.0" encoding="utf-8"?>
-<p:notes xmlns:a="http://schemas.openxmlformats.org/drawingml/2006/main" xmlns:r="http://schemas.openxmlformats.org/officeDocument/2006/relationships" xmlns:p="http://schemas.openxmlformats.org/presentationml/2006/main">
+<p:notes xmlns:a="http://schemas.openxmlformats.org/drawingml/2006/main" xmlns:ns2="http://schemas.microsoft.com/office/powerpoint/2010/main" xmlns:p="http://schemas.openxmlformats.org/presentationml/2006/main">
   <p:cSld>
     <p:spTree>
       <p:nvGrpSpPr>
@@ -1991,7 +1953,7 @@
           <a:bodyPr/>
           <a:lstStyle/>
           <a:p>
-            <a:endParaRPr lang="en-US" dirty="0"/>
+            <a:endParaRPr dirty="0"/>
           </a:p>
         </p:txBody>
       </p:sp>
@@ -2021,7 +1983,7 @@
     </p:spTree>
     <p:extLst>
       <p:ext uri="{BB962C8B-B14F-4D97-AF65-F5344CB8AC3E}">
-        <p14:creationId xmlns:p14="http://schemas.microsoft.com/office/powerpoint/2010/main" val="1024086991"/>
+        <ns2:creationId val="1024086991"/>
       </p:ext>
     </p:extLst>
   </p:cSld>
@@ -2032,7 +1994,7 @@
 </file>
 
 <file path=ppt/notesSlides/notesSlide5.xml><?xml version="1.0" encoding="utf-8"?>
-<p:notes xmlns:a="http://schemas.openxmlformats.org/drawingml/2006/main" xmlns:r="http://schemas.openxmlformats.org/officeDocument/2006/relationships" xmlns:p="http://schemas.openxmlformats.org/presentationml/2006/main">
+<p:notes xmlns:a="http://schemas.openxmlformats.org/drawingml/2006/main" xmlns:ns2="http://schemas.microsoft.com/office/powerpoint/2010/main" xmlns:p="http://schemas.openxmlformats.org/presentationml/2006/main">
   <p:cSld>
     <p:spTree>
       <p:nvGrpSpPr>
@@ -2075,7 +2037,7 @@
           <a:bodyPr/>
           <a:lstStyle/>
           <a:p>
-            <a:endParaRPr lang="en-US" dirty="0"/>
+            <a:endParaRPr dirty="0"/>
           </a:p>
         </p:txBody>
       </p:sp>
@@ -2105,7 +2067,7 @@
     </p:spTree>
     <p:extLst>
       <p:ext uri="{BB962C8B-B14F-4D97-AF65-F5344CB8AC3E}">
-        <p14:creationId xmlns:p14="http://schemas.microsoft.com/office/powerpoint/2010/main" val="1024086991"/>
+        <ns2:creationId val="1024086991"/>
       </p:ext>
     </p:extLst>
   </p:cSld>
@@ -2116,7 +2078,7 @@
 </file>
 
 <file path=ppt/notesSlides/notesSlide6.xml><?xml version="1.0" encoding="utf-8"?>
-<p:notes xmlns:a="http://schemas.openxmlformats.org/drawingml/2006/main" xmlns:r="http://schemas.openxmlformats.org/officeDocument/2006/relationships" xmlns:p="http://schemas.openxmlformats.org/presentationml/2006/main">
+<p:notes xmlns:a="http://schemas.openxmlformats.org/drawingml/2006/main" xmlns:ns2="http://schemas.microsoft.com/office/powerpoint/2010/main" xmlns:p="http://schemas.openxmlformats.org/presentationml/2006/main">
   <p:cSld>
     <p:spTree>
       <p:nvGrpSpPr>
@@ -2159,7 +2121,7 @@
           <a:bodyPr/>
           <a:lstStyle/>
           <a:p>
-            <a:endParaRPr lang="en-US" dirty="0"/>
+            <a:endParaRPr dirty="0"/>
           </a:p>
         </p:txBody>
       </p:sp>
@@ -2189,7 +2151,7 @@
     </p:spTree>
     <p:extLst>
       <p:ext uri="{BB962C8B-B14F-4D97-AF65-F5344CB8AC3E}">
-        <p14:creationId xmlns:p14="http://schemas.microsoft.com/office/powerpoint/2010/main" val="1024086991"/>
+        <ns2:creationId val="1024086991"/>
       </p:ext>
     </p:extLst>
   </p:cSld>
@@ -2200,7 +2162,7 @@
 </file>
 
 <file path=ppt/notesSlides/notesSlide7.xml><?xml version="1.0" encoding="utf-8"?>
-<p:notes xmlns:a="http://schemas.openxmlformats.org/drawingml/2006/main" xmlns:r="http://schemas.openxmlformats.org/officeDocument/2006/relationships" xmlns:p="http://schemas.openxmlformats.org/presentationml/2006/main">
+<p:notes xmlns:a="http://schemas.openxmlformats.org/drawingml/2006/main" xmlns:ns2="http://schemas.microsoft.com/office/powerpoint/2010/main" xmlns:p="http://schemas.openxmlformats.org/presentationml/2006/main">
   <p:cSld>
     <p:spTree>
       <p:nvGrpSpPr>
@@ -2243,7 +2205,7 @@
           <a:bodyPr/>
           <a:lstStyle/>
           <a:p>
-            <a:endParaRPr lang="en-US" dirty="0"/>
+            <a:endParaRPr dirty="0"/>
           </a:p>
         </p:txBody>
       </p:sp>
@@ -2273,7 +2235,7 @@
     </p:spTree>
     <p:extLst>
       <p:ext uri="{BB962C8B-B14F-4D97-AF65-F5344CB8AC3E}">
-        <p14:creationId xmlns:p14="http://schemas.microsoft.com/office/powerpoint/2010/main" val="1024086991"/>
+        <ns2:creationId val="1024086991"/>
       </p:ext>
     </p:extLst>
   </p:cSld>
@@ -2284,7 +2246,7 @@
 </file>
 
 <file path=ppt/notesSlides/notesSlide8.xml><?xml version="1.0" encoding="utf-8"?>
-<p:notes xmlns:a="http://schemas.openxmlformats.org/drawingml/2006/main" xmlns:r="http://schemas.openxmlformats.org/officeDocument/2006/relationships" xmlns:p="http://schemas.openxmlformats.org/presentationml/2006/main">
+<p:notes xmlns:a="http://schemas.openxmlformats.org/drawingml/2006/main" xmlns:ns2="http://schemas.microsoft.com/office/powerpoint/2010/main" xmlns:p="http://schemas.openxmlformats.org/presentationml/2006/main">
   <p:cSld>
     <p:spTree>
       <p:nvGrpSpPr>
@@ -2327,7 +2289,7 @@
           <a:bodyPr/>
           <a:lstStyle/>
           <a:p>
-            <a:endParaRPr lang="en-US" dirty="0"/>
+            <a:endParaRPr dirty="0"/>
           </a:p>
         </p:txBody>
       </p:sp>
@@ -2357,7 +2319,7 @@
     </p:spTree>
     <p:extLst>
       <p:ext uri="{BB962C8B-B14F-4D97-AF65-F5344CB8AC3E}">
-        <p14:creationId xmlns:p14="http://schemas.microsoft.com/office/powerpoint/2010/main" val="1024086991"/>
+        <ns2:creationId val="1024086991"/>
       </p:ext>
     </p:extLst>
   </p:cSld>
@@ -2368,7 +2330,7 @@
 </file>
 
 <file path=ppt/notesSlides/notesSlide9.xml><?xml version="1.0" encoding="utf-8"?>
-<p:notes xmlns:a="http://schemas.openxmlformats.org/drawingml/2006/main" xmlns:r="http://schemas.openxmlformats.org/officeDocument/2006/relationships" xmlns:p="http://schemas.openxmlformats.org/presentationml/2006/main">
+<p:notes xmlns:a="http://schemas.openxmlformats.org/drawingml/2006/main" xmlns:ns2="http://schemas.microsoft.com/office/powerpoint/2010/main" xmlns:p="http://schemas.openxmlformats.org/presentationml/2006/main">
   <p:cSld>
     <p:spTree>
       <p:nvGrpSpPr>
@@ -2411,7 +2373,7 @@
           <a:bodyPr/>
           <a:lstStyle/>
           <a:p>
-            <a:endParaRPr lang="en-US" dirty="0"/>
+            <a:endParaRPr dirty="0"/>
           </a:p>
         </p:txBody>
       </p:sp>
@@ -2441,7 +2403,7 @@
     </p:spTree>
     <p:extLst>
       <p:ext uri="{BB962C8B-B14F-4D97-AF65-F5344CB8AC3E}">
-        <p14:creationId xmlns:p14="http://schemas.microsoft.com/office/powerpoint/2010/main" val="1024086991"/>
+        <ns2:creationId val="1024086991"/>
       </p:ext>
     </p:extLst>
   </p:cSld>
